--- a/decks/geog-urban/geog-urban_ch4_favelas.pptx
+++ b/decks/geog-urban/geog-urban_ch4_favelas.pptx
@@ -126,30 +126,30 @@
   <p:extLst>
     <p:ext uri="{521415D9-36F7-43E2-AB2F-B90AF26B5E84}">
       <p14:sectionLst xmlns:p14="http://schemas.microsoft.com/office/powerpoint/2010/main">
-        <p14:section name="Opening" id="{6ca6beaf-521d-dbe4-18b3-d26245ee5fbe}">
+        <p14:section name="Opening" id="{5255b629-dddf-1c12-c856-9210ed9d8d2c}">
           <p14:sldIdLst>
             <p14:sldId id="256"/>
           </p14:sldIdLst>
         </p14:section>
-        <p14:section name="Gate" id="{1cc46074-5e0a-f164-aafa-3079509ea94c}">
+        <p14:section name="Gate" id="{0558ea6b-3f3e-eb4a-1f02-6193a6e496c5}">
           <p14:sldIdLst>
             <p14:sldId id="257"/>
             <p14:sldId id="258"/>
           </p14:sldIdLst>
         </p14:section>
-        <p14:section name="Pre-teach" id="{46e25286-0eb4-7e52-f9c4-2d615b639f58}">
+        <p14:section name="Pre-teach" id="{5c3f1785-130b-da3e-19e4-ae7987babdea}">
           <p14:sldIdLst>
             <p14:sldId id="259"/>
             <p14:sldId id="260"/>
           </p14:sldIdLst>
         </p14:section>
-        <p14:section name="Read-along" id="{aff9ec0c-672d-8490-fdbd-a5c3b7f74517}">
+        <p14:section name="Read-along" id="{53f8322a-4b5b-2ae5-6d31-645e18dfdfac}">
           <p14:sldIdLst>
             <p14:sldId id="261"/>
             <p14:sldId id="262"/>
           </p14:sldIdLst>
         </p14:section>
-        <p14:section name="Teach" id="{ef3acddd-55cc-5226-1c6b-6dac0eead2cf}">
+        <p14:section name="Teach" id="{cdb41d58-0a08-cb1a-ebb5-54777d3782c7}">
           <p14:sldIdLst>
             <p14:sldId id="263"/>
             <p14:sldId id="264"/>
@@ -158,7 +158,7 @@
             <p14:sldId id="267"/>
           </p14:sldIdLst>
         </p14:section>
-        <p14:section name="Routes" id="{aab6c823-00c8-80bc-e3df-6a131ad3d828}">
+        <p14:section name="Routes" id="{ed3efd24-4846-07f4-d2d4-c15825377a0c}">
           <p14:sldIdLst>
             <p14:sldId id="268"/>
             <p14:sldId id="269"/>
@@ -166,12 +166,12 @@
             <p14:sldId id="271"/>
           </p14:sldIdLst>
         </p14:section>
-        <p14:section name="Close" id="{a22558b8-0e29-40e3-b8e4-f80e32660516}">
+        <p14:section name="Close" id="{2f4998e9-54f5-256a-0c23-59abfc9f262c}">
           <p14:sldIdLst>
             <p14:sldId id="272"/>
           </p14:sldIdLst>
         </p14:section>
-        <p14:section name="Answers" id="{f7aacd09-4d68-ee22-7095-006401b4ea13}">
+        <p14:section name="Answers" id="{a18ad184-cfcc-94bc-4537-1c29d5201e20}">
           <p14:sldIdLst>
             <p14:sldId id="273"/>
             <p14:sldId id="274"/>
@@ -767,7 +767,7 @@
               <a:rPr lang="en-US" dirty="0"/>
               <a:t>Teach — Improving the favelas: the Favela Bairro project. Say it in your own words, then check understanding with a quick question: ask a pupil from the pre-teach group first, since they met these words and ideas before the lesson. Pupils try to recall before you re-explain.
 Rather than clearing the favelas, the city has tried to improve them. The case study you studied is the Favela Bairro project, an urban planning strategy aimed at improving the quality of life of the urban poor. Among its successes are new local health centres in the favelas, bringing health care to people who could not reach the city's hospitals. The project has also worked to upgrade services and the environment of the favelas so that they become proper neighbourhoods, which is what bairro means.
-Your class task was to record at least four successes and four problems of the project from the textbook, and you will need those notes. The exam question for this topic is an evaluation: has the project improved the quality of life for the urban poor? Evaluate means discuss two sides of an issue and make a judgement in your conclusion, so you need the project's advantages and its disadvantages, and then a clear decision about whether it has, overall, been a success or a failure.
+Your class task was to record at least four successes and four problems of the project from the textbook, and you will need those notes. The exam question for this topic is an evaluation: has the project improved the quality of life for the urban poor? To evaluate is to weigh both sides of an issue and then give a judgement in your conclusion, so you need the project's advantages and its disadvantages, and then a clear decision about whether it has, overall, been a success or a failure.
 Alongside Favela Bairro, pacifying police units have been sent into some favelas to reduce crime, which the lesson treated as an economic challenge because it drives away investment and jobs.
 Tip: For a nine-mark evaluate question: introduction, a paragraph for each side, then a conclusion that actually decides. No conclusion, no top marks.</a:t>
             </a:r>
@@ -2256,8 +2256,8 @@
             <a:r>
               <a:rPr lang="en-US" dirty="0"/>
               <a:t>Teach — What is a favela, and why do favelas grow?. Say it in your own words, then check understanding with a quick question: ask a pupil from the pre-teach group first, since they met these words and ideas before the lesson. Pupils try to recall before you re-explain.
-A favela is a shanty town or slum area in or near a city; the general name for the same thing anywhere in the world is a squatter settlement. People build their houses out of basic materials on land they do not own or rent. About 25% of Rio's population lives in favelas, and the largest of them is Rocinha. The lesson described a favela as a social challenge that creates environmental challenges, and the sections below show why.
-Favelas grow because of rural-urban migration. People leave Amazonia and the drought-hit areas of north-east Brazil in the hope of finding a better life in Brazil's main cities. They arrive with very little money and there is no cheap formal housing for them, so they build their own homes on whatever land is free, often steep hillsides or land close to the city's edge. The favelas have a long history too: one video the class watched named two factors behind their beginnings and growth: slavery and migration.
+A favela is a shanty town or slum area in or near a city; the general name for the same thing anywhere in the world is a squatter settlement. Families put up their own homes from whatever materials they can find, on land that is not theirs to own or rent. About 25% of Rio's population lives in favelas, and the largest of them is Rocinha. The lesson described a favela as a social challenge that creates environmental challenges, and the sections below show why.
+Favelas grow because of rural-urban migration. People leave Amazonia and the drought-hit areas of north-east Brazil hoping for a better life in one of Brazil's big cities. They arrive with very little money and there is no cheap formal housing for them, so they build their own homes on whatever land is free, often steep hillsides or land close to the city's edge. The favelas have a long history too: one video the class watched named two factors behind their beginnings and growth: slavery and migration.
 Tip: Favela is the Brazilian word; squatter settlement is the geographical term. Use both so the examiner knows you know.</a:t>
             </a:r>
             <a:endParaRPr lang="en-US" dirty="0"/>
@@ -17589,7 +17589,7 @@
                 <a:ea typeface="Calibri" pitchFamily="34" charset="-122"/>
                 <a:cs typeface="Calibri" pitchFamily="34" charset="-120"/>
               </a:rPr>
-              <a:t>Favelas grow because of rural-urban migration. People leave Amazonia and the drought-hit areas of north-east Brazil in the hope of finding a better life in Brazil's main cities.</a:t>
+              <a:t>Favelas grow because of rural-urban migration. People leave Amazonia and the drought-hit areas of north-east Brazil hoping for a better life in one of Brazil's big cities.</a:t>
             </a:r>
             <a:endParaRPr lang="en-US" sz="2400" dirty="0"/>
           </a:p>
